--- a/dist/초1/사회·역사/나와학교/초1_사회·역사_나와학교_02_함께지킬약속_학생용.pptx
+++ b/dist/초1/사회·역사/나와학교/초1_사회·역사_나와학교_02_함께지킬약속_학생용.pptx
@@ -118,19 +118,19 @@
   <p:extLst>
     <p:ext uri="{521415D9-36F7-43E2-AB2F-B90AF26B5E84}">
       <p14:sectionLst xmlns:p14="http://schemas.microsoft.com/office/powerpoint/2010/main">
-        <p14:section name="도입" id="{11150be4-501d-6f73-3b4b-d6ac708142c3}">
+        <p14:section name="도입" id="{498d577c-d681-90f6-d0d5-ac644ef6f689}">
           <p14:sldIdLst>
             <p14:sldId id="256"/>
             <p14:sldId id="257"/>
           </p14:sldIdLst>
         </p14:section>
-        <p14:section name="개념" id="{cd1b766d-8c0e-1e54-df92-152bc5b8a070}">
+        <p14:section name="개념" id="{098d6c66-5599-f99d-1d2a-9cb5f45c9f43}">
           <p14:sldIdLst>
             <p14:sldId id="258"/>
             <p14:sldId id="259"/>
           </p14:sldIdLst>
         </p14:section>
-        <p14:section name="연습" id="{68c98a6d-ae50-2b41-949d-3e2749b4136d}">
+        <p14:section name="연습" id="{2b8f9a3f-b28c-6213-558e-273f5099e7a2}">
           <p14:sldIdLst>
             <p14:sldId id="260"/>
             <p14:sldId id="261"/>
@@ -138,18 +138,18 @@
             <p14:sldId id="263"/>
           </p14:sldIdLst>
         </p14:section>
-        <p14:section name="확인" id="{05816666-b9cb-cf33-771e-1108508386fc}">
+        <p14:section name="확인" id="{a3c33c8c-4594-b6c0-47cb-9a550eaf9237}">
           <p14:sldIdLst>
             <p14:sldId id="264"/>
             <p14:sldId id="265"/>
           </p14:sldIdLst>
         </p14:section>
-        <p14:section name="정리" id="{bf366598-554c-679f-cbee-140065f1bb36}">
+        <p14:section name="정리" id="{cc87f4f2-28c3-1fd5-85a7-3b8069bbf6bc}">
           <p14:sldIdLst>
             <p14:sldId id="266"/>
           </p14:sldIdLst>
         </p14:section>
-        <p14:section name="보충" id="{53c1fc27-a45c-cde7-48ca-46dd2280d4fd}">
+        <p14:section name="보충" id="{177052cb-073b-ae96-5c6b-88a901fbc845}">
           <p14:sldIdLst>
             <p14:sldId id="267"/>
           </p14:sldIdLst>
